--- a/Review_SHA256_2x2.pptx
+++ b/Review_SHA256_2x2.pptx
@@ -7315,7 +7315,7 @@
                 </a:solidFill>
                 <a:latin typeface="Century Schoolbook"/>
               </a:rPr>
-              <a:t>69 RTL checks and 10 software checks, all passing.</a:t>
+              <a:t>103 RTL checks and 21 software checks, all passing.</a:t>
             </a:r>
           </a:p>
         </p:txBody>
@@ -7394,7 +7394,7 @@
                 </a:solidFill>
                 <a:latin typeface="Century Schoolbook"/>
               </a:rPr>
-              <a:t>69</a:t>
+              <a:t>103</a:t>
             </a:r>
           </a:p>
         </p:txBody>
@@ -7508,7 +7508,7 @@
                 </a:solidFill>
                 <a:latin typeface="Century Schoolbook"/>
               </a:rPr>
-              <a:t>10</a:t>
+              <a:t>21</a:t>
             </a:r>
           </a:p>
         </p:txBody>
@@ -7622,7 +7622,7 @@
                 </a:solidFill>
                 <a:latin typeface="Century Schoolbook"/>
               </a:rPr>
-              <a:t>64</a:t>
+              <a:t>4</a:t>
             </a:r>
           </a:p>
         </p:txBody>
@@ -7657,7 +7657,7 @@
                 </a:solidFill>
                 <a:latin typeface="Calibri"/>
               </a:rPr>
-              <a:t>rounds traced</a:t>
+              <a:t>configs, one round module</a:t>
             </a:r>
           </a:p>
         </p:txBody>
@@ -7943,7 +7943,7 @@
         <p:spPr>
           <a:xfrm>
             <a:off x="6309360" y="4087368"/>
-            <a:ext cx="5029200" cy="1828800"/>
+            <a:ext cx="5029200" cy="2194560"/>
           </a:xfrm>
           <a:prstGeom prst="rect">
             <a:avLst/>
@@ -8018,6 +8018,31 @@
                 </a:solidFill>
                 <a:latin typeface="Calibri"/>
               </a:rPr>
+              <a:t>Dual-stream over AXI: </a:t>
+            </a:r>
+            <a:r>
+              <a:rPr sz="1350" b="0">
+                <a:solidFill>
+                  <a:srgbClr val="6B7078"/>
+                </a:solidFill>
+                <a:latin typeface="Calibri"/>
+              </a:rPr>
+              <a:t>17 system checks each for C and D; the interleaving wire format is unit-tested on the host</a:t>
+            </a:r>
+          </a:p>
+          <a:p>
+            <a:pPr>
+              <a:spcAft>
+                <a:spcPts val="900"/>
+              </a:spcAft>
+            </a:pPr>
+            <a:r>
+              <a:rPr sz="1350" b="1">
+                <a:solidFill>
+                  <a:srgbClr val="2B333C"/>
+                </a:solidFill>
+                <a:latin typeface="Calibri"/>
+              </a:rPr>
               <a:t>Cycle counts </a:t>
             </a:r>
             <a:r>
@@ -8027,7 +8052,7 @@
                 </a:solidFill>
                 <a:latin typeface="Calibri"/>
               </a:rPr>
-              <a:t>66, 34, 33 and 17 confirmed in simulation</a:t>
+              <a:t>core 66/34/33/17 and system 85/53/51/35, measured</a:t>
             </a:r>
           </a:p>
         </p:txBody>
